--- a/mavenprojectSCR/CreatePowerPointXDDFChart.pptx
+++ b/mavenprojectSCR/CreatePowerPointXDDFChart.pptx
@@ -131,7 +131,7 @@
     </c:title>
     <c:plotArea>
       <c:barChart>
-        <c:barDir val="bar"/>
+        <c:barDir val="col"/>
         <c:ser>
           <c:idx val="0"/>
           <c:order val="0"/>
